--- a/deck/Case2-shipment-checker-deck.pptx
+++ b/deck/Case2-shipment-checker-deck.pptx
@@ -3250,7 +3250,7 @@
                 </a:solidFill>
                 <a:latin typeface="Calibri"/>
               </a:rPr>
-              <a:t>Team: Anant Jain and [partner name]</a:t>
+              <a:t>Team: Anant Jain and Anshu Tolasaria</a:t>
             </a:r>
           </a:p>
           <a:p>
